--- a/slides/Lesson 2 - Why AI Makes Things Up.pptx
+++ b/slides/Lesson 2 - Why AI Makes Things Up.pptx
@@ -11035,7 +11035,7 @@
                 </a:solidFill>
                 <a:latin typeface="Poppins"/>
               </a:rPr>
-              <a:t>200,000 tokens. A textbook fits. A year of notes does not.</a:t>
+              <a:t>400,000 tokens. A textbook fits. A year of notes does not.</a:t>
             </a:r>
           </a:p>
         </p:txBody>
@@ -11193,7 +11193,7 @@
                 </a:solidFill>
                 <a:latin typeface="Poppins"/>
               </a:rPr>
-              <a:t>$12.50 per 100 questions for a textbook. $75 for a year of notes.</a:t>
+              <a:t>$9.38 per 100 questions for a textbook. $56.25 for a year of notes.</a:t>
             </a:r>
           </a:p>
         </p:txBody>
